--- a/cursos/recursos/arbitro-nacional/06-piezas-mal-colocadas-y-otras-incidencias-de-mesa.pptx
+++ b/cursos/recursos/arbitro-nacional/06-piezas-mal-colocadas-y-otras-incidencias-de-mesa.pptx
@@ -3435,7 +3435,7 @@
                 </a:solidFill>
                 <a:latin typeface="Calibri"/>
               </a:rPr>
-              <a:t>Las incidencias más frecuentes fuera del artículo 7.5: mesa mal armada, pieza caída, toque accidental.</a:t>
+              <a:t>Las incidencias más frecuentes fuera del artículo 7.5: piezas desplazadas por accidente y las que se descubren fuera de su casilla sin saber cuándo pasó.</a:t>
             </a:r>
           </a:p>
         </p:txBody>
@@ -3712,7 +3712,7 @@
                 </a:solidFill>
                 <a:latin typeface="Calibri"/>
               </a:rPr>
-              <a:t>Si se descubre que el tablero estaba mal orientado o el juego mal colocado, se restablece la posición correcta manteniendo el número de jugadas y el tiempo consumido — salvo que eso resulte imposible de reconstruir, caso en que se decide con el criterio más razonable disponible. La regla general del artículo 7 es siempre la misma: conservar lo que sí se puede reconstruir (tiempo, número de jugada) y solo corregir lo que estaba mal.</a:t>
+              <a:t>Distinto de una jugada ilegal es que alguien desplace una pieza sin intención de jugarla (art. 7.4): al tropezar con la mesa, al estirar el brazo. Quien la desplazó debe restablecer la posición correcta en su propio tiempo — no se para el reloj del rival para eso —, y quien arbitra puede sancionar si fue reiterado o parece intencional (buscando ganar tiempo, por ejemplo). Si nadie sabe con certeza en qué momento se desplazó una pieza (art. 7.6), se restablece la posición de antes de la irregularidad y, si no se puede determinar, se sigue desde la última posición identificable — el mismo criterio de reconstrucción que en una jugada ilegal.</a:t>
             </a:r>
           </a:p>
         </p:txBody>
@@ -4696,7 +4696,7 @@
                 </a:solidFill>
                 <a:latin typeface="Cambria"/>
               </a:rPr>
-              <a:t>Simular tres incidencias de mesa distintas (tablero mal orientado detectado en la jugada 15, una pieza caída que el rival interpreta como jugada, y un desacuerdo sobre qué pieza se tocó primero) y resolver cada una en voz alta, cronometrando cuánto tarda la decisión.</a:t>
+              <a:t>Simular tres incidencias de mesa distintas (una pieza desplazada por accidente al mover el tablero, una que aparece fuera de su casilla sin que nadie sepa desde cuándo, y un desacuerdo sobre qué pieza se tocó primero) y resolver cada una en voz alta, cronometrando cuánto tarda la decisión.</a:t>
             </a:r>
           </a:p>
         </p:txBody>
